--- a/docs/exports/slides.pptx
+++ b/docs/exports/slides.pptx
@@ -11621,7 +11621,7 @@
                 </a:solidFill>
                 <a:latin typeface="Inter"/>
               </a:rPr>
-              <a:t>class_weight balanced + augmentation</a:t>
+              <a:t>two-layer class balancing</a:t>
             </a:r>
           </a:p>
         </p:txBody>
@@ -11656,7 +11656,7 @@
                 </a:solidFill>
                 <a:latin typeface="JetBrains Mono"/>
               </a:rPr>
-              <a:t>flip · rot · brightness · contrast · zoom</a:t>
+              <a:t>sample-level oversampling (balance.py) + loss-level class_weight</a:t>
             </a:r>
           </a:p>
         </p:txBody>
@@ -11769,7 +11769,7 @@
                 </a:solidFill>
                 <a:latin typeface="Inter"/>
               </a:rPr>
-              <a:t>mixed precision on CUDA</a:t>
+              <a:t>augmentation pipeline</a:t>
             </a:r>
           </a:p>
         </p:txBody>
@@ -11804,7 +11804,7 @@
                 </a:solidFill>
                 <a:latin typeface="JetBrains Mono"/>
               </a:rPr>
-              <a:t>fp16 forward · fp32 softmax/loss</a:t>
+              <a:t>flip · rotation · brightness · contrast · zoom</a:t>
             </a:r>
           </a:p>
         </p:txBody>
@@ -11917,6 +11917,154 @@
                 </a:solidFill>
                 <a:latin typeface="Inter"/>
               </a:rPr>
+              <a:t>mixed precision on CUDA</a:t>
+            </a:r>
+          </a:p>
+        </p:txBody>
+      </p:sp>
+      <p:sp>
+        <p:nvSpPr>
+          <p:cNvPr id="35" name="TextBox 34"/>
+          <p:cNvSpPr txBox="1"/>
+          <p:nvPr/>
+        </p:nvSpPr>
+        <p:spPr>
+          <a:xfrm>
+            <a:off x="1463040" y="5641848"/>
+            <a:ext cx="10058400" cy="365760"/>
+          </a:xfrm>
+          <a:prstGeom prst="rect">
+            <a:avLst/>
+          </a:prstGeom>
+          <a:noFill/>
+        </p:spPr>
+        <p:txBody>
+          <a:bodyPr wrap="square" lIns="0" rIns="0" tIns="0" bIns="0" anchor="t">
+            <a:spAutoFit/>
+          </a:bodyPr>
+          <a:lstStyle/>
+          <a:p>
+            <a:pPr algn="l"/>
+            <a:r>
+              <a:rPr sz="1100" b="0">
+                <a:solidFill>
+                  <a:srgbClr val="94A3B8"/>
+                </a:solidFill>
+                <a:latin typeface="JetBrains Mono"/>
+              </a:rPr>
+              <a:t>fp16 forward · fp32 softmax/loss</a:t>
+            </a:r>
+          </a:p>
+        </p:txBody>
+      </p:sp>
+      <p:sp>
+        <p:nvSpPr>
+          <p:cNvPr id="36" name="Rectangle 35"/>
+          <p:cNvSpPr/>
+          <p:nvPr/>
+        </p:nvSpPr>
+        <p:spPr>
+          <a:xfrm>
+            <a:off x="457200" y="5943600"/>
+            <a:ext cx="868680" cy="502920"/>
+          </a:xfrm>
+          <a:prstGeom prst="rect">
+            <a:avLst/>
+          </a:prstGeom>
+          <a:solidFill>
+            <a:srgbClr val="1E293B"/>
+          </a:solidFill>
+          <a:ln>
+            <a:noFill/>
+          </a:ln>
+        </p:spPr>
+        <p:style>
+          <a:lnRef idx="1">
+            <a:schemeClr val="accent1"/>
+          </a:lnRef>
+          <a:fillRef idx="3">
+            <a:schemeClr val="accent1"/>
+          </a:fillRef>
+          <a:effectRef idx="2">
+            <a:schemeClr val="accent1"/>
+          </a:effectRef>
+          <a:fontRef idx="minor">
+            <a:schemeClr val="lt1"/>
+          </a:fontRef>
+        </p:style>
+        <p:txBody>
+          <a:bodyPr rtlCol="0" anchor="ctr"/>
+          <a:lstStyle/>
+          <a:p>
+            <a:pPr algn="ctr"/>
+          </a:p>
+        </p:txBody>
+      </p:sp>
+      <p:sp>
+        <p:nvSpPr>
+          <p:cNvPr id="37" name="TextBox 36"/>
+          <p:cNvSpPr txBox="1"/>
+          <p:nvPr/>
+        </p:nvSpPr>
+        <p:spPr>
+          <a:xfrm>
+            <a:off x="502920" y="6071616"/>
+            <a:ext cx="822960" cy="365760"/>
+          </a:xfrm>
+          <a:prstGeom prst="rect">
+            <a:avLst/>
+          </a:prstGeom>
+          <a:noFill/>
+        </p:spPr>
+        <p:txBody>
+          <a:bodyPr wrap="square" lIns="0" rIns="0" tIns="0" bIns="0" anchor="t">
+            <a:spAutoFit/>
+          </a:bodyPr>
+          <a:lstStyle/>
+          <a:p>
+            <a:pPr algn="ctr"/>
+            <a:r>
+              <a:rPr sz="1000" b="0">
+                <a:solidFill>
+                  <a:srgbClr val="94A3B8"/>
+                </a:solidFill>
+                <a:latin typeface="JetBrains Mono"/>
+              </a:rPr>
+              <a:t>All</a:t>
+            </a:r>
+          </a:p>
+        </p:txBody>
+      </p:sp>
+      <p:sp>
+        <p:nvSpPr>
+          <p:cNvPr id="38" name="TextBox 37"/>
+          <p:cNvSpPr txBox="1"/>
+          <p:nvPr/>
+        </p:nvSpPr>
+        <p:spPr>
+          <a:xfrm>
+            <a:off x="1463040" y="5989320"/>
+            <a:ext cx="6400800" cy="365760"/>
+          </a:xfrm>
+          <a:prstGeom prst="rect">
+            <a:avLst/>
+          </a:prstGeom>
+          <a:noFill/>
+        </p:spPr>
+        <p:txBody>
+          <a:bodyPr wrap="square" lIns="0" rIns="0" tIns="0" bIns="0" anchor="t">
+            <a:spAutoFit/>
+          </a:bodyPr>
+          <a:lstStyle/>
+          <a:p>
+            <a:pPr algn="l"/>
+            <a:r>
+              <a:rPr sz="1500" b="1">
+                <a:solidFill>
+                  <a:srgbClr val="F8FAFC"/>
+                </a:solidFill>
+                <a:latin typeface="Inter"/>
+              </a:rPr>
               <a:t>checkpoints on best val_acc</a:t>
             </a:r>
           </a:p>
@@ -11924,13 +12072,13 @@
       </p:sp>
       <p:sp>
         <p:nvSpPr>
-          <p:cNvPr id="35" name="TextBox 34"/>
-          <p:cNvSpPr txBox="1"/>
-          <p:nvPr/>
-        </p:nvSpPr>
-        <p:spPr>
-          <a:xfrm>
-            <a:off x="1463040" y="5641848"/>
+          <p:cNvPr id="39" name="TextBox 38"/>
+          <p:cNvSpPr txBox="1"/>
+          <p:nvPr/>
+        </p:nvSpPr>
+        <p:spPr>
+          <a:xfrm>
+            <a:off x="1463040" y="6236208"/>
             <a:ext cx="10058400" cy="365760"/>
           </a:xfrm>
           <a:prstGeom prst="rect">
